--- a/artifacts/speaking-portfolio-expanded/decks/adaptive-systems-screen.pptx
+++ b/artifacts/speaking-portfolio-expanded/decks/adaptive-systems-screen.pptx
@@ -3453,7 +3453,7 @@
                 <a:ea typeface="Arial"/>
                 <a:cs typeface="Arial"/>
               </a:rPr>
-              <a:t xml:space="preserve">And return to the assistant with everything. We never built it. We built a factory for small ones, each with a tailored prompt, a short tool list, a hard budget, and a log of every time it asked for more. That is the strategy I believe in for the next few years: not one agent you have to trust, but many you can afford to check.</a:t>
+              <a:t xml:space="preserve">And return to the assistant with everything. It is still coming; nothing on these slides stops it, and I would not want to. What changed is how many of its pathways are live at once. Each job gets a small agent with a tailored prompt, a short tool list, a hard budget, and a log of every time it asked for more. That is the strategy I believe in for the next few years: not one agent holding every combination, which nobody can check, but many small ones you can afford to.</a:t>
             </a:r>
             <a:endParaRPr lang="en-US" sz="1200"/>
           </a:p>
@@ -4070,7 +4070,7 @@
                 <a:ea typeface="Arial"/>
                 <a:cs typeface="Arial"/>
               </a:rPr>
-              <a:t xml:space="preserve">Now imagine the assistant that has everything</a:t>
+              <a:t xml:space="preserve">The assistant with everything is coming, one integration at a time</a:t>
             </a:r>
             <a:endParaRPr lang="en-US" sz="1200"/>
           </a:p>
@@ -4162,76 +4162,76 @@
                 <a:ea typeface="Arial"/>
                 <a:cs typeface="Arial"/>
               </a:rPr>
-              <a:t xml:space="preserve">![One agent holding every customer record and every dangerous tool is a breach waiting for a typo.](../../reveal-talks/assets/adaptive-systems/03-the-assistant-with-everything.svg)</a:t>
-            </a:r>
-            <a:endParaRPr lang="en-US" sz="1200"/>
-          </a:p>
-          <a:p>
-            <a:pPr marL="0" indent="0">
-              <a:lnSpc>
-                <a:spcPts val="1560"/>
-              </a:lnSpc>
-              <a:spcAft>
-                <a:spcPts val="0"/>
-              </a:spcAft>
-              <a:buNone/>
-            </a:pPr>
-            <a:r>
-              <a:rPr lang="en-US" sz="1200" b="0">
-                <a:solidFill>
-                  <a:srgbClr val="202b33"/>
-                </a:solidFill>
-                <a:latin typeface="Arial"/>
-                <a:ea typeface="Arial"/>
-                <a:cs typeface="Arial"/>
-              </a:rPr>
-              <a:t xml:space="preserve"/>
-            </a:r>
-            <a:endParaRPr lang="en-US" sz="1200"/>
-          </a:p>
-          <a:p>
-            <a:pPr marL="0" indent="0">
-              <a:lnSpc>
-                <a:spcPts val="1560"/>
-              </a:lnSpc>
-              <a:spcAft>
-                <a:spcPts val="0"/>
-              </a:spcAft>
-              <a:buNone/>
-            </a:pPr>
-            <a:r>
-              <a:rPr lang="en-US" sz="1200" b="0">
-                <a:solidFill>
-                  <a:srgbClr val="202b33"/>
-                </a:solidFill>
-                <a:latin typeface="Arial"/>
-                <a:ea typeface="Arial"/>
-                <a:cs typeface="Arial"/>
-              </a:rPr>
-              <a:t xml:space="preserve">&gt; All customer data</a:t>
-            </a:r>
-            <a:endParaRPr lang="en-US" sz="1200"/>
-          </a:p>
-          <a:p>
-            <a:pPr marL="0" indent="0">
-              <a:lnSpc>
-                <a:spcPts val="1560"/>
-              </a:lnSpc>
-              <a:spcAft>
-                <a:spcPts val="0"/>
-              </a:spcAft>
-              <a:buNone/>
-            </a:pPr>
-            <a:r>
-              <a:rPr lang="en-US" sz="1200" b="0">
-                <a:solidFill>
-                  <a:srgbClr val="202b33"/>
-                </a:solidFill>
-                <a:latin typeface="Arial"/>
-                <a:ea typeface="Arial"/>
-                <a:cs typeface="Arial"/>
-              </a:rPr>
-              <a:t xml:space="preserve">&gt; Tools that email, refund, delete, deploy</a:t>
+              <a:t xml:space="preserve">![Every integration multiplies the pathways from something the agent can read to something it can do; nobody reviews the combinations.](../../reveal-talks/assets/adaptive-systems/03-the-assistant-with-everything.svg)</a:t>
+            </a:r>
+            <a:endParaRPr lang="en-US" sz="1200"/>
+          </a:p>
+          <a:p>
+            <a:pPr marL="0" indent="0">
+              <a:lnSpc>
+                <a:spcPts val="1560"/>
+              </a:lnSpc>
+              <a:spcAft>
+                <a:spcPts val="0"/>
+              </a:spcAft>
+              <a:buNone/>
+            </a:pPr>
+            <a:r>
+              <a:rPr lang="en-US" sz="1200" b="0">
+                <a:solidFill>
+                  <a:srgbClr val="202b33"/>
+                </a:solidFill>
+                <a:latin typeface="Arial"/>
+                <a:ea typeface="Arial"/>
+                <a:cs typeface="Arial"/>
+              </a:rPr>
+              <a:t xml:space="preserve"/>
+            </a:r>
+            <a:endParaRPr lang="en-US" sz="1200"/>
+          </a:p>
+          <a:p>
+            <a:pPr marL="0" indent="0">
+              <a:lnSpc>
+                <a:spcPts val="1560"/>
+              </a:lnSpc>
+              <a:spcAft>
+                <a:spcPts val="0"/>
+              </a:spcAft>
+              <a:buNone/>
+            </a:pPr>
+            <a:r>
+              <a:rPr lang="en-US" sz="1200" b="0">
+                <a:solidFill>
+                  <a:srgbClr val="202b33"/>
+                </a:solidFill>
+                <a:latin typeface="Arial"/>
+                <a:ea typeface="Arial"/>
+                <a:cs typeface="Arial"/>
+              </a:rPr>
+              <a:t xml:space="preserve">&gt; Browsers, CLIs, every SaaS: an agent layer you opt out of with --no-agent</a:t>
+            </a:r>
+            <a:endParaRPr lang="en-US" sz="1200"/>
+          </a:p>
+          <a:p>
+            <a:pPr marL="0" indent="0">
+              <a:lnSpc>
+                <a:spcPts val="1560"/>
+              </a:lnSpc>
+              <a:spcAft>
+                <a:spcPts val="0"/>
+              </a:spcAft>
+              <a:buNone/>
+            </a:pPr>
+            <a:r>
+              <a:rPr lang="en-US" sz="1200" b="0">
+                <a:solidFill>
+                  <a:srgbClr val="202b33"/>
+                </a:solidFill>
+                <a:latin typeface="Arial"/>
+                <a:ea typeface="Arial"/>
+                <a:cs typeface="Arial"/>
+              </a:rPr>
+              <a:t xml:space="preserve">&gt; Ten tools is forty-five pairs. One more integration is not one more path.</a:t>
             </a:r>
             <a:endParaRPr lang="en-US" sz="1200"/>
           </a:p>
@@ -4300,191 +4300,237 @@
                 <a:ea typeface="Arial"/>
                 <a:cs typeface="Arial"/>
               </a:rPr>
-              <a:t xml:space="preserve">Zoom out from the ingest job. The thing we are all building toward is an assistant with access to every customer's data and a toolbox that can send email, issue refunds, delete records and ship code. Most of the damage it will ever do will be an accident: a confident mapping, a helpful cleanup, a tool called with the wrong ID.</a:t>
-            </a:r>
-            <a:endParaRPr lang="en-US" sz="1200"/>
-          </a:p>
-          <a:p>
-            <a:pPr marL="0" indent="0">
-              <a:lnSpc>
-                <a:spcPts val="1560"/>
-              </a:lnSpc>
-              <a:spcAft>
-                <a:spcPts val="0"/>
-              </a:spcAft>
-              <a:buNone/>
-            </a:pPr>
-            <a:r>
-              <a:rPr lang="en-US" sz="1200" b="0">
-                <a:solidFill>
-                  <a:srgbClr val="202b33"/>
-                </a:solidFill>
-                <a:latin typeface="Arial"/>
-                <a:ea typeface="Arial"/>
-                <a:cs typeface="Arial"/>
-              </a:rPr>
-              <a:t xml:space="preserve"/>
-            </a:r>
-            <a:endParaRPr lang="en-US" sz="1200"/>
-          </a:p>
-          <a:p>
-            <a:pPr marL="0" indent="0">
-              <a:lnSpc>
-                <a:spcPts val="1560"/>
-              </a:lnSpc>
-              <a:spcAft>
-                <a:spcPts val="0"/>
-              </a:spcAft>
-              <a:buNone/>
-            </a:pPr>
-            <a:r>
-              <a:rPr lang="en-US" sz="1200" b="0">
-                <a:solidFill>
-                  <a:srgbClr val="202b33"/>
-                </a:solidFill>
-                <a:latin typeface="Arial"/>
-                <a:ea typeface="Arial"/>
-                <a:cs typeface="Arial"/>
-              </a:rPr>
-              <a:t xml:space="preserve">Then there are the people who mean it. That renamed field could carry a sentence aimed at the model. A vendor payload is untrusted input that now gets read by something that can act.</a:t>
-            </a:r>
-            <a:endParaRPr lang="en-US" sz="1200"/>
-          </a:p>
-          <a:p>
-            <a:pPr marL="0" indent="0">
-              <a:lnSpc>
-                <a:spcPts val="1560"/>
-              </a:lnSpc>
-              <a:spcAft>
-                <a:spcPts val="0"/>
-              </a:spcAft>
-              <a:buNone/>
-            </a:pPr>
-            <a:r>
-              <a:rPr lang="en-US" sz="1200" b="0">
-                <a:solidFill>
-                  <a:srgbClr val="202b33"/>
-                </a:solidFill>
-                <a:latin typeface="Arial"/>
-                <a:ea typeface="Arial"/>
-                <a:cs typeface="Arial"/>
-              </a:rPr>
-              <a:t xml:space="preserve"/>
-            </a:r>
-            <a:endParaRPr lang="en-US" sz="1200"/>
-          </a:p>
-          <a:p>
-            <a:pPr marL="0" indent="0">
-              <a:lnSpc>
-                <a:spcPts val="1560"/>
-              </a:lnSpc>
-              <a:spcAft>
-                <a:spcPts val="0"/>
-              </a:spcAft>
-              <a:buNone/>
-            </a:pPr>
-            <a:r>
-              <a:rPr lang="en-US" sz="1200" b="0">
-                <a:solidFill>
-                  <a:srgbClr val="202b33"/>
-                </a:solidFill>
-                <a:latin typeface="Arial"/>
-                <a:ea typeface="Arial"/>
-                <a:cs typeface="Arial"/>
-              </a:rPr>
-              <a:t xml:space="preserve">So the question for the next few years is not whether to give the assistant access. It is which strategies let us give it access and manage the risk. My answer, and what I have been building, is: never build the one assistant that has everything. Conjure a small one for each job, with exactly enough.</a:t>
-            </a:r>
-            <a:endParaRPr lang="en-US" sz="1200"/>
-          </a:p>
-          <a:p>
-            <a:pPr marL="0" indent="0">
-              <a:lnSpc>
-                <a:spcPts val="1560"/>
-              </a:lnSpc>
-              <a:spcAft>
-                <a:spcPts val="0"/>
-              </a:spcAft>
-              <a:buNone/>
-            </a:pPr>
-            <a:r>
-              <a:rPr lang="en-US" sz="1200" b="0">
-                <a:solidFill>
-                  <a:srgbClr val="202b33"/>
-                </a:solidFill>
-                <a:latin typeface="Arial"/>
-                <a:ea typeface="Arial"/>
-                <a:cs typeface="Arial"/>
-              </a:rPr>
-              <a:t xml:space="preserve"/>
-            </a:r>
-            <a:endParaRPr lang="en-US" sz="1200"/>
-          </a:p>
-          <a:p>
-            <a:pPr marL="0" indent="0">
-              <a:lnSpc>
-                <a:spcPts val="1560"/>
-              </a:lnSpc>
-              <a:spcAft>
-                <a:spcPts val="0"/>
-              </a:spcAft>
-              <a:buNone/>
-            </a:pPr>
-            <a:r>
-              <a:rPr lang="en-US" sz="1200" b="0">
-                <a:solidFill>
-                  <a:srgbClr val="202b33"/>
-                </a:solidFill>
-                <a:latin typeface="Arial"/>
-                <a:ea typeface="Arial"/>
-                <a:cs typeface="Arial"/>
-              </a:rPr>
-              <a:t xml:space="preserve">Story: Your own near miss with an over-permissioned agent, or a tool call you were glad had a dry-run flag.</a:t>
-            </a:r>
-            <a:endParaRPr lang="en-US" sz="1200"/>
-          </a:p>
-          <a:p>
-            <a:pPr marL="0" indent="0">
-              <a:lnSpc>
-                <a:spcPts val="1560"/>
-              </a:lnSpc>
-              <a:spcAft>
-                <a:spcPts val="0"/>
-              </a:spcAft>
-              <a:buNone/>
-            </a:pPr>
-            <a:r>
-              <a:rPr lang="en-US" sz="1200" b="0">
-                <a:solidFill>
-                  <a:srgbClr val="202b33"/>
-                </a:solidFill>
-                <a:latin typeface="Arial"/>
-                <a:ea typeface="Arial"/>
-                <a:cs typeface="Arial"/>
-              </a:rPr>
-              <a:t xml:space="preserve"/>
-            </a:r>
-            <a:endParaRPr lang="en-US" sz="1200"/>
-          </a:p>
-          <a:p>
-            <a:pPr marL="0" indent="0">
-              <a:lnSpc>
-                <a:spcPts val="1560"/>
-              </a:lnSpc>
-              <a:spcAft>
-                <a:spcPts val="0"/>
-              </a:spcAft>
-              <a:buNone/>
-            </a:pPr>
-            <a:r>
-              <a:rPr lang="en-US" sz="1200" b="0">
-                <a:solidFill>
-                  <a:srgbClr val="202b33"/>
-                </a:solidFill>
-                <a:latin typeface="Arial"/>
-                <a:ea typeface="Arial"/>
-                <a:cs typeface="Arial"/>
-              </a:rPr>
-              <a:t xml:space="preserve">Stage direction: Pause on the third line. Let the room feel that the accident case is the common one.</a:t>
+              <a:t xml:space="preserve">Zoom out from the ingest job. The assistant with every customer's data and a toolbox that can send email, issue refunds, delete records and ship code is not a design we get to decline. It is arriving one integration at a time, and not only in our products. Browsers now ship a chat that drives the page. WebMCP lets an agent act on whatever site you have open. The next generation of CLIs will take natural language by default, and you will pass `--no-agent` to get the old behavior back. The intermediary intelligence layer is going to wrap everything, and I know who to blame: the kids. Actually, the kids hate AI. It will be their kids who demand an agent safety blanket on everything. I will be in a rocking chair explaining that the internet was better on vinyl.</a:t>
+            </a:r>
+            <a:endParaRPr lang="en-US" sz="1200"/>
+          </a:p>
+          <a:p>
+            <a:pPr marL="0" indent="0">
+              <a:lnSpc>
+                <a:spcPts val="1560"/>
+              </a:lnSpc>
+              <a:spcAft>
+                <a:spcPts val="0"/>
+              </a:spcAft>
+              <a:buNone/>
+            </a:pPr>
+            <a:r>
+              <a:rPr lang="en-US" sz="1200" b="0">
+                <a:solidFill>
+                  <a:srgbClr val="202b33"/>
+                </a:solidFill>
+                <a:latin typeface="Arial"/>
+                <a:ea typeface="Arial"/>
+                <a:cs typeface="Arial"/>
+              </a:rPr>
+              <a:t xml:space="preserve"/>
+            </a:r>
+            <a:endParaRPr lang="en-US" sz="1200"/>
+          </a:p>
+          <a:p>
+            <a:pPr marL="0" indent="0">
+              <a:lnSpc>
+                <a:spcPts val="1560"/>
+              </a:lnSpc>
+              <a:spcAft>
+                <a:spcPts val="0"/>
+              </a:spcAft>
+              <a:buNone/>
+            </a:pPr>
+            <a:r>
+              <a:rPr lang="en-US" sz="1200" b="0">
+                <a:solidFill>
+                  <a:srgbClr val="202b33"/>
+                </a:solidFill>
+                <a:latin typeface="Arial"/>
+                <a:ea typeface="Arial"/>
+                <a:cs typeface="Arial"/>
+              </a:rPr>
+              <a:t xml:space="preserve">So here is the hazard, and it applies to the small systems too. Risk does not grow with the number of tools. It grows with the number of pathways between them, and every integration multiplies those. Ten tools is forty-five pairs before you count chains. Plug in one SaaS with a dozen endpoints and you did not add twelve capabilities; you added hundreds of routes from something the agent can read to something it can do. Nobody reviews those combinations. Not your security team, not the model, not you at three in the morning. The dangerous pairing is never on the roadmap. It gets discovered.</a:t>
+            </a:r>
+            <a:endParaRPr lang="en-US" sz="1200"/>
+          </a:p>
+          <a:p>
+            <a:pPr marL="0" indent="0">
+              <a:lnSpc>
+                <a:spcPts val="1560"/>
+              </a:lnSpc>
+              <a:spcAft>
+                <a:spcPts val="0"/>
+              </a:spcAft>
+              <a:buNone/>
+            </a:pPr>
+            <a:r>
+              <a:rPr lang="en-US" sz="1200" b="0">
+                <a:solidFill>
+                  <a:srgbClr val="202b33"/>
+                </a:solidFill>
+                <a:latin typeface="Arial"/>
+                <a:ea typeface="Arial"/>
+                <a:cs typeface="Arial"/>
+              </a:rPr>
+              <a:t xml:space="preserve"/>
+            </a:r>
+            <a:endParaRPr lang="en-US" sz="1200"/>
+          </a:p>
+          <a:p>
+            <a:pPr marL="0" indent="0">
+              <a:lnSpc>
+                <a:spcPts val="1560"/>
+              </a:lnSpc>
+              <a:spcAft>
+                <a:spcPts val="0"/>
+              </a:spcAft>
+              <a:buNone/>
+            </a:pPr>
+            <a:r>
+              <a:rPr lang="en-US" sz="1200" b="0">
+                <a:solidFill>
+                  <a:srgbClr val="202b33"/>
+                </a:solidFill>
+                <a:latin typeface="Arial"/>
+                <a:ea typeface="Arial"/>
+                <a:cs typeface="Arial"/>
+              </a:rPr>
+              <a:t xml:space="preserve">Most of the damage will be accidents: a confident mapping, a helpful cleanup, a tool called with the wrong ID. Then there are the people who mean it. That renamed field could carry a sentence aimed at the model, and a vendor payload is untrusted input that now gets read by something that can act.</a:t>
+            </a:r>
+            <a:endParaRPr lang="en-US" sz="1200"/>
+          </a:p>
+          <a:p>
+            <a:pPr marL="0" indent="0">
+              <a:lnSpc>
+                <a:spcPts val="1560"/>
+              </a:lnSpc>
+              <a:spcAft>
+                <a:spcPts val="0"/>
+              </a:spcAft>
+              <a:buNone/>
+            </a:pPr>
+            <a:r>
+              <a:rPr lang="en-US" sz="1200" b="0">
+                <a:solidFill>
+                  <a:srgbClr val="202b33"/>
+                </a:solidFill>
+                <a:latin typeface="Arial"/>
+                <a:ea typeface="Arial"/>
+                <a:cs typeface="Arial"/>
+              </a:rPr>
+              <a:t xml:space="preserve"/>
+            </a:r>
+            <a:endParaRPr lang="en-US" sz="1200"/>
+          </a:p>
+          <a:p>
+            <a:pPr marL="0" indent="0">
+              <a:lnSpc>
+                <a:spcPts val="1560"/>
+              </a:lnSpc>
+              <a:spcAft>
+                <a:spcPts val="0"/>
+              </a:spcAft>
+              <a:buNone/>
+            </a:pPr>
+            <a:r>
+              <a:rPr lang="en-US" sz="1200" b="0">
+                <a:solidFill>
+                  <a:srgbClr val="202b33"/>
+                </a:solidFill>
+                <a:latin typeface="Arial"/>
+                <a:ea typeface="Arial"/>
+                <a:cs typeface="Arial"/>
+              </a:rPr>
+              <a:t xml:space="preserve">So the question is not whether to give the assistant access. It is how to keep the number of live pathways small enough to reason about, one job at a time. That is what the rest of this talk builds. The big assistant still exists. It just never has all of its hands full at once: it conjures a small agent per job, with exactly enough.</a:t>
+            </a:r>
+            <a:endParaRPr lang="en-US" sz="1200"/>
+          </a:p>
+          <a:p>
+            <a:pPr marL="0" indent="0">
+              <a:lnSpc>
+                <a:spcPts val="1560"/>
+              </a:lnSpc>
+              <a:spcAft>
+                <a:spcPts val="0"/>
+              </a:spcAft>
+              <a:buNone/>
+            </a:pPr>
+            <a:r>
+              <a:rPr lang="en-US" sz="1200" b="0">
+                <a:solidFill>
+                  <a:srgbClr val="202b33"/>
+                </a:solidFill>
+                <a:latin typeface="Arial"/>
+                <a:ea typeface="Arial"/>
+                <a:cs typeface="Arial"/>
+              </a:rPr>
+              <a:t xml:space="preserve"/>
+            </a:r>
+            <a:endParaRPr lang="en-US" sz="1200"/>
+          </a:p>
+          <a:p>
+            <a:pPr marL="0" indent="0">
+              <a:lnSpc>
+                <a:spcPts val="1560"/>
+              </a:lnSpc>
+              <a:spcAft>
+                <a:spcPts val="0"/>
+              </a:spcAft>
+              <a:buNone/>
+            </a:pPr>
+            <a:r>
+              <a:rPr lang="en-US" sz="1200" b="0">
+                <a:solidFill>
+                  <a:srgbClr val="202b33"/>
+                </a:solidFill>
+                <a:latin typeface="Arial"/>
+                <a:ea typeface="Arial"/>
+                <a:cs typeface="Arial"/>
+              </a:rPr>
+              <a:t xml:space="preserve">Story: Your own near miss with an over-permissioned agent, or the tool pairing you only noticed after it fired.</a:t>
+            </a:r>
+            <a:endParaRPr lang="en-US" sz="1200"/>
+          </a:p>
+          <a:p>
+            <a:pPr marL="0" indent="0">
+              <a:lnSpc>
+                <a:spcPts val="1560"/>
+              </a:lnSpc>
+              <a:spcAft>
+                <a:spcPts val="0"/>
+              </a:spcAft>
+              <a:buNone/>
+            </a:pPr>
+            <a:r>
+              <a:rPr lang="en-US" sz="1200" b="0">
+                <a:solidFill>
+                  <a:srgbClr val="202b33"/>
+                </a:solidFill>
+                <a:latin typeface="Arial"/>
+                <a:ea typeface="Arial"/>
+                <a:cs typeface="Arial"/>
+              </a:rPr>
+              <a:t xml:space="preserve"/>
+            </a:r>
+            <a:endParaRPr lang="en-US" sz="1200"/>
+          </a:p>
+          <a:p>
+            <a:pPr marL="0" indent="0">
+              <a:lnSpc>
+                <a:spcPts val="1560"/>
+              </a:lnSpc>
+              <a:spcAft>
+                <a:spcPts val="0"/>
+              </a:spcAft>
+              <a:buNone/>
+            </a:pPr>
+            <a:r>
+              <a:rPr lang="en-US" sz="1200" b="0">
+                <a:solidFill>
+                  <a:srgbClr val="202b33"/>
+                </a:solidFill>
+                <a:latin typeface="Arial"/>
+                <a:ea typeface="Arial"/>
+                <a:cs typeface="Arial"/>
+              </a:rPr>
+              <a:t xml:space="preserve">Stage direction: Write 10 → 45 on the board. Ask who could list every read-to-write pathway in the agent they run today. Pause on the third line; let the room feel that the accident case is the common one.</a:t>
             </a:r>
             <a:endParaRPr lang="en-US" sz="1200"/>
           </a:p>
@@ -11404,7 +11450,30 @@
                 <a:ea typeface="Arial"/>
                 <a:cs typeface="Arial"/>
               </a:rPr>
-              <a:t xml:space="preserve">Now imagine the assistant that has everything</a:t>
+              <a:t xml:space="preserve">The assistant with everything is coming, one</a:t>
+            </a:r>
+            <a:endParaRPr lang="en-US" sz="3900"/>
+          </a:p>
+          <a:p>
+            <a:pPr marL="0" indent="0">
+              <a:lnSpc>
+                <a:spcPts val="4680"/>
+              </a:lnSpc>
+              <a:spcAft>
+                <a:spcPts val="0"/>
+              </a:spcAft>
+              <a:buNone/>
+            </a:pPr>
+            <a:r>
+              <a:rPr lang="en-US" sz="3900" b="1">
+                <a:solidFill>
+                  <a:srgbClr val="F5F1E9"/>
+                </a:solidFill>
+                <a:latin typeface="Arial"/>
+                <a:ea typeface="Arial"/>
+                <a:cs typeface="Arial"/>
+              </a:rPr>
+              <a:t xml:space="preserve">integration at a time</a:t>
             </a:r>
             <a:endParaRPr lang="en-US" sz="3900"/>
           </a:p>
@@ -11434,7 +11503,7 @@
       </p:sp>
       <p:pic>
         <p:nvPicPr>
-          <p:cNvPr id="5" name="f205bb45584f3452c187099cc77d62202d1ca938a5d7dfba32f6435461e10a23" descr="One agent holding every customer record and every dangerous tool is a breach waiting for a typo."/>
+          <p:cNvPr id="5" name="c6f0fbb68e5ce78026448103d918b67135212db9e9f49deb90f1f192122fe3b4" descr="Every integration multiplies the pathways from something the agent can read to something it can do; nobody reviews the combinations."/>
           <p:cNvPicPr>
             <a:picLocks noChangeAspect="1"/>
           </p:cNvPicPr>

--- a/artifacts/speaking-portfolio-expanded/decks/adaptive-systems-screen.pptx
+++ b/artifacts/speaking-portfolio-expanded/decks/adaptive-systems-screen.pptx
@@ -1161,7 +1161,7 @@
                 <a:ea typeface="Arial"/>
                 <a:cs typeface="Arial"/>
               </a:rPr>
-              <a:t xml:space="preserve">Scale becomes something the app asks for</a:t>
+              <a:t xml:space="preserve">Compute Is a Tool Too</a:t>
             </a:r>
             <a:endParaRPr lang="en-US" sz="1200"/>
           </a:p>
@@ -1688,7 +1688,7 @@
                 <a:ea typeface="Arial"/>
                 <a:cs typeface="Arial"/>
               </a:rPr>
-              <a:t xml:space="preserve">Show engineers what changed today</a:t>
+              <a:t xml:space="preserve">Ironies of Automation</a:t>
             </a:r>
             <a:endParaRPr lang="en-US" sz="1200"/>
           </a:p>
@@ -1987,7 +1987,7 @@
                 <a:ea typeface="Arial"/>
                 <a:cs typeface="Arial"/>
               </a:rPr>
-              <a:t xml:space="preserve">One warning about that report, and it is the warning for this whole talk. In 1983 Lisanne Bainbridge published a paper called Ironies of Automation. The irony is that automating the routine cases does not remove the human, it promotes them to monitoring a system that is almost always right, and people are measurably bad at that job. Skitka and colleagues put numbers on it in 1999: people given a highly but imperfectly reliable aid did worse than people given no aid at all. So keep the report short, ranked, and usually almost empty. A digest nobody can finish is a digest nobody reads, and then the guard post is decorative.</a:t>
+              <a:t xml:space="preserve">One warning about that report, and it is the warning for this whole talk. In 1983 Lisanne Bainbridge published a paper called Ironies of Automation. The irony is that automating the routine cases does not remove the human, it promotes them to monitoring a system that is almost always right, and people are measurably bad at that job. Skitka and colleagues put numbers on it in 1999: on the events the aid got wrong, people given a highly but imperfectly reliable aid did worse than people given no aid at all. So keep the report short, ranked, and usually almost empty. A digest nobody can finish is a digest nobody reads, and then the guard post is decorative.</a:t>
             </a:r>
             <a:endParaRPr lang="en-US" sz="1200"/>
           </a:p>
@@ -2192,7 +2192,7 @@
                 <a:ea typeface="Arial"/>
                 <a:cs typeface="Arial"/>
               </a:rPr>
-              <a:t xml:space="preserve">Widen authority only from measured outcomes</a:t>
+              <a:t xml:space="preserve">Widen Per Class, Never Per Streak</a:t>
             </a:r>
             <a:endParaRPr lang="en-US" sz="1200"/>
           </a:p>
@@ -2422,7 +2422,7 @@
                 <a:ea typeface="Arial"/>
                 <a:cs typeface="Arial"/>
               </a:rPr>
-              <a:t xml:space="preserve">Start in shadow mode: the conjured agents propose artifacts and apply none. Then permit one reversible change class. Widen authority per class, from evidence about that class. This is the same discipline for tools and for compute.</a:t>
+              <a:t xml:space="preserve">Start in shadow mode: the conjured agents propose artifacts and apply none. Then permit one reversible change class. Widen authority per class, from evidence about that class. This is the same discipline for tools and for compute. It is also the loop that lets the system adjust its own fan-out and token burn from measured acceptance: acceptance up and false repairs flat, that job class gets more parallel attempts and a bigger budget; false repairs up, both come down.</a:t>
             </a:r>
             <a:endParaRPr lang="en-US" sz="1200"/>
           </a:p>
@@ -3635,7 +3635,7 @@
                 <a:ea typeface="Arial"/>
                 <a:cs typeface="Arial"/>
               </a:rPr>
-              <a:t xml:space="preserve">The bar is: diff the schema and page a human</a:t>
+              <a:t xml:space="preserve">The Bar Is a Pager</a:t>
             </a:r>
             <a:endParaRPr lang="en-US" sz="1200"/>
           </a:p>
@@ -4070,7 +4070,7 @@
                 <a:ea typeface="Arial"/>
                 <a:cs typeface="Arial"/>
               </a:rPr>
-              <a:t xml:space="preserve">The assistant with everything is coming, one integration at a time</a:t>
+              <a:t xml:space="preserve">Sorry, You're Building It</a:t>
             </a:r>
             <a:endParaRPr lang="en-US" sz="1200"/>
           </a:p>
@@ -4300,7 +4300,7 @@
                 <a:ea typeface="Arial"/>
                 <a:cs typeface="Arial"/>
               </a:rPr>
-              <a:t xml:space="preserve">Zoom out from the ingest job. The assistant with every customer's data and a toolbox that can send email, issue refunds, delete records and ship code is not a design we get to decline. It is arriving one integration at a time, and not only in our products. Browsers now ship a chat that drives the page. WebMCP lets an agent act on whatever site you have open. The next generation of CLIs will take natural language by default, and you will pass `--no-agent` to get the old behavior back. The intermediary intelligence layer is going to wrap everything, and I know who to blame: the kids. Actually, the kids hate AI. It will be their kids who demand an agent safety blanket on everything. I will be in a rocking chair explaining that the internet was better on vinyl.</a:t>
+              <a:t xml:space="preserve">Zoom out from the ingest job. The assistant with every customer's data and a toolbox that can send email, issue refunds, delete records and ship code is not a design we get to decline. It is arriving one integration at a time, and not only in our products. Browsers now ship a chat that drives the page. WebMCP lets an agent act on any site that opts in, and the list of sites that opt in only goes one direction. The next generation of CLIs will take natural language by default, and you will pass `--no-agent` to get the old behavior back. The intermediary intelligence layer is going to wrap everything, and I know who to blame: the kids. Actually, the kids hate AI. It will be their kids who demand an agent safety blanket on everything. I will be in a rocking chair explaining that the internet was better on vinyl.</a:t>
             </a:r>
             <a:endParaRPr lang="en-US" sz="1200"/>
           </a:p>
@@ -5377,7 +5377,7 @@
                 <a:ea typeface="Arial"/>
                 <a:cs typeface="Arial"/>
               </a:rPr>
-              <a:t xml:space="preserve">&gt; Read customer data and post to a vendor never share one agent</a:t>
+              <a:t xml:space="preserve">&gt; Reads customer data? Then it never posts to a vendor.</a:t>
             </a:r>
             <a:endParaRPr lang="en-US" sz="1200"/>
           </a:p>
@@ -8217,7 +8217,7 @@
                 <a:ea typeface="Arial"/>
                 <a:cs typeface="Arial"/>
               </a:rPr>
-              <a:t xml:space="preserve">Scale becomes something the app asks for</a:t>
+              <a:t xml:space="preserve">Compute Is a Tool Too</a:t>
             </a:r>
             <a:endParaRPr lang="en-US" sz="3900"/>
           </a:p>
@@ -8501,7 +8501,7 @@
                 <a:ea typeface="Arial"/>
                 <a:cs typeface="Arial"/>
               </a:rPr>
-              <a:t xml:space="preserve">Show engineers what changed today</a:t>
+              <a:t xml:space="preserve">Ironies of Automation</a:t>
             </a:r>
             <a:endParaRPr lang="en-US" sz="3900"/>
           </a:p>
@@ -9145,7 +9145,7 @@
                 <a:ea typeface="Arial"/>
                 <a:cs typeface="Arial"/>
               </a:rPr>
-              <a:t xml:space="preserve">Widen authority only from measured outcomes</a:t>
+              <a:t xml:space="preserve">Widen Per Class, Never Per Streak</a:t>
             </a:r>
             <a:endParaRPr lang="en-US" sz="3900"/>
           </a:p>
@@ -10904,7 +10904,7 @@
                 <a:ea typeface="Arial"/>
                 <a:cs typeface="Arial"/>
               </a:rPr>
-              <a:t xml:space="preserve">The bar is: diff the schema and page a human</a:t>
+              <a:t xml:space="preserve">The Bar Is a Pager</a:t>
             </a:r>
             <a:endParaRPr lang="en-US" sz="3900"/>
           </a:p>
@@ -11450,30 +11450,7 @@
                 <a:ea typeface="Arial"/>
                 <a:cs typeface="Arial"/>
               </a:rPr>
-              <a:t xml:space="preserve">The assistant with everything is coming, one</a:t>
-            </a:r>
-            <a:endParaRPr lang="en-US" sz="3900"/>
-          </a:p>
-          <a:p>
-            <a:pPr marL="0" indent="0">
-              <a:lnSpc>
-                <a:spcPts val="4680"/>
-              </a:lnSpc>
-              <a:spcAft>
-                <a:spcPts val="0"/>
-              </a:spcAft>
-              <a:buNone/>
-            </a:pPr>
-            <a:r>
-              <a:rPr lang="en-US" sz="3900" b="1">
-                <a:solidFill>
-                  <a:srgbClr val="F5F1E9"/>
-                </a:solidFill>
-                <a:latin typeface="Arial"/>
-                <a:ea typeface="Arial"/>
-                <a:cs typeface="Arial"/>
-              </a:rPr>
-              <a:t xml:space="preserve">integration at a time</a:t>
+              <a:t xml:space="preserve">Sorry, You're Building It</a:t>
             </a:r>
             <a:endParaRPr lang="en-US" sz="3900"/>
           </a:p>

--- a/artifacts/speaking-portfolio-expanded/decks/adaptive-systems-screen.pptx
+++ b/artifacts/speaking-portfolio-expanded/decks/adaptive-systems-screen.pptx
@@ -4300,7 +4300,53 @@
                 <a:ea typeface="Arial"/>
                 <a:cs typeface="Arial"/>
               </a:rPr>
-              <a:t xml:space="preserve">Zoom out from the ingest job. The assistant with every customer's data and a toolbox that can send email, issue refunds, delete records and ship code is not a design we get to decline. It is arriving one integration at a time, and not only in our products. Browsers now ship a chat that drives the page. WebMCP lets an agent act on any site that opts in, and the list of sites that opt in only goes one direction. The next generation of CLIs will take natural language by default, and you will pass `--no-agent` to get the old behavior back. The intermediary intelligence layer is going to wrap everything, and I know who to blame: the kids. Actually, the kids hate AI. It will be their kids who demand an agent safety blanket on everything. I will be in a rocking chair explaining that the internet was better on vinyl.</a:t>
+              <a:t xml:space="preserve">Zoom out from the ingest job. The assistant with every customer's data and a toolbox that can send email, issue refunds, delete records and ship code is not a design we get to decline. It is arriving one integration at a time, and not only in our products.</a:t>
+            </a:r>
+            <a:endParaRPr lang="en-US" sz="1200"/>
+          </a:p>
+          <a:p>
+            <a:pPr marL="0" indent="0">
+              <a:lnSpc>
+                <a:spcPts val="1560"/>
+              </a:lnSpc>
+              <a:spcAft>
+                <a:spcPts val="0"/>
+              </a:spcAft>
+              <a:buNone/>
+            </a:pPr>
+            <a:r>
+              <a:rPr lang="en-US" sz="1200" b="0">
+                <a:solidFill>
+                  <a:srgbClr val="202b33"/>
+                </a:solidFill>
+                <a:latin typeface="Arial"/>
+                <a:ea typeface="Arial"/>
+                <a:cs typeface="Arial"/>
+              </a:rPr>
+              <a:t xml:space="preserve"/>
+            </a:r>
+            <a:endParaRPr lang="en-US" sz="1200"/>
+          </a:p>
+          <a:p>
+            <a:pPr marL="0" indent="0">
+              <a:lnSpc>
+                <a:spcPts val="1560"/>
+              </a:lnSpc>
+              <a:spcAft>
+                <a:spcPts val="0"/>
+              </a:spcAft>
+              <a:buNone/>
+            </a:pPr>
+            <a:r>
+              <a:rPr lang="en-US" sz="1200" b="0">
+                <a:solidFill>
+                  <a:srgbClr val="202b33"/>
+                </a:solidFill>
+                <a:latin typeface="Arial"/>
+                <a:ea typeface="Arial"/>
+                <a:cs typeface="Arial"/>
+              </a:rPr>
+              <a:t xml:space="preserve">Browsers now ship a chat that drives the page. WebMCP lets an agent act on any site that opts in, and the list of sites that opt in only goes one direction. The next generation of CLIs will take natural language by default, and you will pass `--no-agent` to get the old behavior back. The intermediary intelligence layer is going to wrap everything, and I know who to blame: the kids. Actually, the kids hate AI. It will be their kids who demand an agent safety blanket on everything. I will be in a rocking chair explaining that the internet was better on vinyl.</a:t>
             </a:r>
             <a:endParaRPr lang="en-US" sz="1200"/>
           </a:p>

--- a/artifacts/speaking-portfolio-expanded/decks/adaptive-systems-screen.pptx
+++ b/artifacts/speaking-portfolio-expanded/decks/adaptive-systems-screen.pptx
@@ -680,7 +680,7 @@
                 <a:ea typeface="Arial"/>
                 <a:cs typeface="Arial"/>
               </a:rPr>
-              <a:t xml:space="preserve">23:00 to 28:00 · peak</a:t>
+              <a:t xml:space="preserve">21:30 to 26:00 · peak</a:t>
             </a:r>
             <a:endParaRPr lang="en-US" sz="1200"/>
           </a:p>
@@ -1207,7 +1207,7 @@
                 <a:ea typeface="Arial"/>
                 <a:cs typeface="Arial"/>
               </a:rPr>
-              <a:t xml:space="preserve">28:00 to 31:00 · build</a:t>
+              <a:t xml:space="preserve">26:00 to 28:30 · build</a:t>
             </a:r>
             <a:endParaRPr lang="en-US" sz="1200"/>
           </a:p>
@@ -1391,99 +1391,99 @@
                 <a:ea typeface="Arial"/>
                 <a:cs typeface="Arial"/>
               </a:rPr>
-              <a:t xml:space="preserve">One more thing the orchestrator can conjure: compute. Today scaling is an infra decision made once for everyone. Replica counts, instance classes, an autoscaler watching CPU. The agent inverts that. It knows this batch is mostly waiting on a provider, that eight sandboxes for six minutes would clear the backlog, and what this customer's plan allows.</a:t>
-            </a:r>
-            <a:endParaRPr lang="en-US" sz="1200"/>
-          </a:p>
-          <a:p>
-            <a:pPr marL="0" indent="0">
-              <a:lnSpc>
-                <a:spcPts val="1560"/>
-              </a:lnSpc>
-              <a:spcAft>
-                <a:spcPts val="0"/>
-              </a:spcAft>
-              <a:buNone/>
-            </a:pPr>
-            <a:r>
-              <a:rPr lang="en-US" sz="1200" b="0">
-                <a:solidFill>
-                  <a:srgbClr val="202b33"/>
-                </a:solidFill>
-                <a:latin typeface="Arial"/>
-                <a:ea typeface="Arial"/>
-                <a:cs typeface="Arial"/>
-              </a:rPr>
-              <a:t xml:space="preserve"/>
-            </a:r>
-            <a:endParaRPr lang="en-US" sz="1200"/>
-          </a:p>
-          <a:p>
-            <a:pPr marL="0" indent="0">
-              <a:lnSpc>
-                <a:spcPts val="1560"/>
-              </a:lnSpc>
-              <a:spcAft>
-                <a:spcPts val="0"/>
-              </a:spcAft>
-              <a:buNone/>
-            </a:pPr>
-            <a:r>
-              <a:rPr lang="en-US" sz="1200" b="0">
-                <a:solidFill>
-                  <a:srgbClr val="202b33"/>
-                </a:solidFill>
-                <a:latin typeface="Arial"/>
-                <a:ea typeface="Arial"/>
-                <a:cs typeface="Arial"/>
-              </a:rPr>
-              <a:t xml:space="preserve">So it asks. The request names shape, size, duration and a cost cap, and it is charged to this customer or this job rather than to a shared cluster. That is a new product surface: a customer can buy a faster turnaround, and a finance team can cap a single workflow instead of a whole environment.</a:t>
-            </a:r>
-            <a:endParaRPr lang="en-US" sz="1200"/>
-          </a:p>
-          <a:p>
-            <a:pPr marL="0" indent="0">
-              <a:lnSpc>
-                <a:spcPts val="1560"/>
-              </a:lnSpc>
-              <a:spcAft>
-                <a:spcPts val="0"/>
-              </a:spcAft>
-              <a:buNone/>
-            </a:pPr>
-            <a:r>
-              <a:rPr lang="en-US" sz="1200" b="0">
-                <a:solidFill>
-                  <a:srgbClr val="202b33"/>
-                </a:solidFill>
-                <a:latin typeface="Arial"/>
-                <a:ea typeface="Arial"/>
-                <a:cs typeface="Arial"/>
-              </a:rPr>
-              <a:t xml:space="preserve"/>
-            </a:r>
-            <a:endParaRPr lang="en-US" sz="1200"/>
-          </a:p>
-          <a:p>
-            <a:pPr marL="0" indent="0">
-              <a:lnSpc>
-                <a:spcPts val="1560"/>
-              </a:lnSpc>
-              <a:spcAft>
-                <a:spcPts val="0"/>
-              </a:spcAft>
-              <a:buNone/>
-            </a:pPr>
-            <a:r>
-              <a:rPr lang="en-US" sz="1200" b="0">
-                <a:solidFill>
-                  <a:srgbClr val="202b33"/>
-                </a:solidFill>
-                <a:latin typeface="Arial"/>
-                <a:ea typeface="Arial"/>
-                <a:cs typeface="Arial"/>
-              </a:rPr>
-              <a:t xml:space="preserve">The guard is the same one we used for tools. The agent chooses from a catalog of approved instance classes; the scheduler enforces leases and teardown; an unapproved faster region is not a candidate no matter how good the latency looks. The mechanics and the ecosystem are a companion talk.</a:t>
+              <a:t xml:space="preserve">One more thing the orchestrator can conjure: compute. Scaling is still an infra decision made once for everyone — replica counts, instance classes, an autoscaler watching CPU. The agent inverts that. It knows this batch is mostly waiting on a provider, that eight sandboxes for six minutes would clear the backlog, and what this customer's plan allows.</a:t>
+            </a:r>
+            <a:endParaRPr lang="en-US" sz="1200"/>
+          </a:p>
+          <a:p>
+            <a:pPr marL="0" indent="0">
+              <a:lnSpc>
+                <a:spcPts val="1560"/>
+              </a:lnSpc>
+              <a:spcAft>
+                <a:spcPts val="0"/>
+              </a:spcAft>
+              <a:buNone/>
+            </a:pPr>
+            <a:r>
+              <a:rPr lang="en-US" sz="1200" b="0">
+                <a:solidFill>
+                  <a:srgbClr val="202b33"/>
+                </a:solidFill>
+                <a:latin typeface="Arial"/>
+                <a:ea typeface="Arial"/>
+                <a:cs typeface="Arial"/>
+              </a:rPr>
+              <a:t xml:space="preserve"/>
+            </a:r>
+            <a:endParaRPr lang="en-US" sz="1200"/>
+          </a:p>
+          <a:p>
+            <a:pPr marL="0" indent="0">
+              <a:lnSpc>
+                <a:spcPts val="1560"/>
+              </a:lnSpc>
+              <a:spcAft>
+                <a:spcPts val="0"/>
+              </a:spcAft>
+              <a:buNone/>
+            </a:pPr>
+            <a:r>
+              <a:rPr lang="en-US" sz="1200" b="0">
+                <a:solidFill>
+                  <a:srgbClr val="202b33"/>
+                </a:solidFill>
+                <a:latin typeface="Arial"/>
+                <a:ea typeface="Arial"/>
+                <a:cs typeface="Arial"/>
+              </a:rPr>
+              <a:t xml:space="preserve">So it asks. The request names shape, size, duration and a cost cap, charged to this job rather than a shared cluster. That is a new product surface: a customer buys a faster turnaround, and finance caps one workflow instead of an environment.</a:t>
+            </a:r>
+            <a:endParaRPr lang="en-US" sz="1200"/>
+          </a:p>
+          <a:p>
+            <a:pPr marL="0" indent="0">
+              <a:lnSpc>
+                <a:spcPts val="1560"/>
+              </a:lnSpc>
+              <a:spcAft>
+                <a:spcPts val="0"/>
+              </a:spcAft>
+              <a:buNone/>
+            </a:pPr>
+            <a:r>
+              <a:rPr lang="en-US" sz="1200" b="0">
+                <a:solidFill>
+                  <a:srgbClr val="202b33"/>
+                </a:solidFill>
+                <a:latin typeface="Arial"/>
+                <a:ea typeface="Arial"/>
+                <a:cs typeface="Arial"/>
+              </a:rPr>
+              <a:t xml:space="preserve"/>
+            </a:r>
+            <a:endParaRPr lang="en-US" sz="1200"/>
+          </a:p>
+          <a:p>
+            <a:pPr marL="0" indent="0">
+              <a:lnSpc>
+                <a:spcPts val="1560"/>
+              </a:lnSpc>
+              <a:spcAft>
+                <a:spcPts val="0"/>
+              </a:spcAft>
+              <a:buNone/>
+            </a:pPr>
+            <a:r>
+              <a:rPr lang="en-US" sz="1200" b="0">
+                <a:solidFill>
+                  <a:srgbClr val="202b33"/>
+                </a:solidFill>
+                <a:latin typeface="Arial"/>
+                <a:ea typeface="Arial"/>
+                <a:cs typeface="Arial"/>
+              </a:rPr>
+              <a:t xml:space="preserve">The guard is the tool guard. The agent chooses from a catalog of approved instance classes, the scheduler enforces leases and teardown, and an unapproved faster region is not a candidate no matter how good the latency looks. The mechanics are a companion talk.</a:t>
             </a:r>
             <a:endParaRPr lang="en-US" sz="1200"/>
           </a:p>
@@ -1734,7 +1734,7 @@
                 <a:ea typeface="Arial"/>
                 <a:cs typeface="Arial"/>
               </a:rPr>
-              <a:t xml:space="preserve">31:00 to 33:00 · steady</a:t>
+              <a:t xml:space="preserve">28:30 to 31:30 · steady</a:t>
             </a:r>
             <a:endParaRPr lang="en-US" sz="1200"/>
           </a:p>
@@ -1941,53 +1941,53 @@
                 <a:ea typeface="Arial"/>
                 <a:cs typeface="Arial"/>
               </a:rPr>
-              <a:t xml:space="preserve">Log decisions and artifacts, not private reasoning. The inputs to the policy decision, the validator result, and the executed action are enough to reconstruct an incident. Urgent problems page through existing thresholds; the digest is for drift. Never make an agent the sole judge of whether its own failure deserves attention.</a:t>
-            </a:r>
-            <a:endParaRPr lang="en-US" sz="1200"/>
-          </a:p>
-          <a:p>
-            <a:pPr marL="0" indent="0">
-              <a:lnSpc>
-                <a:spcPts val="1560"/>
-              </a:lnSpc>
-              <a:spcAft>
-                <a:spcPts val="0"/>
-              </a:spcAft>
-              <a:buNone/>
-            </a:pPr>
-            <a:r>
-              <a:rPr lang="en-US" sz="1200" b="0">
-                <a:solidFill>
-                  <a:srgbClr val="202b33"/>
-                </a:solidFill>
-                <a:latin typeface="Arial"/>
-                <a:ea typeface="Arial"/>
-                <a:cs typeface="Arial"/>
-              </a:rPr>
-              <a:t xml:space="preserve"/>
-            </a:r>
-            <a:endParaRPr lang="en-US" sz="1200"/>
-          </a:p>
-          <a:p>
-            <a:pPr marL="0" indent="0">
-              <a:lnSpc>
-                <a:spcPts val="1560"/>
-              </a:lnSpc>
-              <a:spcAft>
-                <a:spcPts val="0"/>
-              </a:spcAft>
-              <a:buNone/>
-            </a:pPr>
-            <a:r>
-              <a:rPr lang="en-US" sz="1200" b="0">
-                <a:solidFill>
-                  <a:srgbClr val="202b33"/>
-                </a:solidFill>
-                <a:latin typeface="Arial"/>
-                <a:ea typeface="Arial"/>
-                <a:cs typeface="Arial"/>
-              </a:rPr>
-              <a:t xml:space="preserve">One warning about that report, and it is the warning for this whole talk. In 1983 Lisanne Bainbridge published a paper called Ironies of Automation. The irony is that automating the routine cases does not remove the human, it promotes them to monitoring a system that is almost always right, and people are measurably bad at that job. Skitka and colleagues put numbers on it in 1999: on the events the aid got wrong, people given a highly but imperfectly reliable aid did worse than people given no aid at all. So keep the report short, ranked, and usually almost empty. A digest nobody can finish is a digest nobody reads, and then the guard post is decorative.</a:t>
+              <a:t xml:space="preserve">Log decisions and artifacts, not private reasoning: policy inputs, validator result, executed action. That is enough to reconstruct an incident. Urgent problems page through existing thresholds; the digest is for drift. Never make an agent the sole judge of whether its own failure deserves attention.</a:t>
+            </a:r>
+            <a:endParaRPr lang="en-US" sz="1200"/>
+          </a:p>
+          <a:p>
+            <a:pPr marL="0" indent="0">
+              <a:lnSpc>
+                <a:spcPts val="1560"/>
+              </a:lnSpc>
+              <a:spcAft>
+                <a:spcPts val="0"/>
+              </a:spcAft>
+              <a:buNone/>
+            </a:pPr>
+            <a:r>
+              <a:rPr lang="en-US" sz="1200" b="0">
+                <a:solidFill>
+                  <a:srgbClr val="202b33"/>
+                </a:solidFill>
+                <a:latin typeface="Arial"/>
+                <a:ea typeface="Arial"/>
+                <a:cs typeface="Arial"/>
+              </a:rPr>
+              <a:t xml:space="preserve"/>
+            </a:r>
+            <a:endParaRPr lang="en-US" sz="1200"/>
+          </a:p>
+          <a:p>
+            <a:pPr marL="0" indent="0">
+              <a:lnSpc>
+                <a:spcPts val="1560"/>
+              </a:lnSpc>
+              <a:spcAft>
+                <a:spcPts val="0"/>
+              </a:spcAft>
+              <a:buNone/>
+            </a:pPr>
+            <a:r>
+              <a:rPr lang="en-US" sz="1200" b="0">
+                <a:solidFill>
+                  <a:srgbClr val="202b33"/>
+                </a:solidFill>
+                <a:latin typeface="Arial"/>
+                <a:ea typeface="Arial"/>
+                <a:cs typeface="Arial"/>
+              </a:rPr>
+              <a:t xml:space="preserve">One warning about that report, and it is the warning for this whole talk. Lisanne Bainbridge, 1983, Ironies of Automation: automating the routine cases does not remove the human, it promotes them to monitoring a system that is almost always right, and people are measurably bad at that job. Skitka and colleagues put numbers on it in 1999 — on the events the aid got wrong, people with a highly but imperfectly reliable aid did worse than people with no aid at all. So keep the report short, ranked, and usually almost empty. A digest nobody finishes is a digest nobody reads, and then the guard post is decorative.</a:t>
             </a:r>
             <a:endParaRPr lang="en-US" sz="1200"/>
           </a:p>
@@ -2238,7 +2238,7 @@
                 <a:ea typeface="Arial"/>
                 <a:cs typeface="Arial"/>
               </a:rPr>
-              <a:t xml:space="preserve">33:00 to 35:00 · land</a:t>
+              <a:t xml:space="preserve">31:30 to 34:00 · land</a:t>
             </a:r>
             <a:endParaRPr lang="en-US" sz="1200"/>
           </a:p>
@@ -2422,7 +2422,7 @@
                 <a:ea typeface="Arial"/>
                 <a:cs typeface="Arial"/>
               </a:rPr>
-              <a:t xml:space="preserve">Start in shadow mode: the conjured agents propose artifacts and apply none. Then permit one reversible change class. Widen authority per class, from evidence about that class. This is the same discipline for tools and for compute. It is also the loop that lets the system adjust its own fan-out and token burn from measured acceptance: acceptance up and false repairs flat, that job class gets more parallel attempts and a bigger budget; false repairs up, both come down.</a:t>
+              <a:t xml:space="preserve">Start in shadow mode: the conjured agents propose artifacts and apply none. Then permit one reversible change class, and widen authority per class from evidence about that class. Same discipline for tools and for compute. It is also the loop that tunes its own fan-out: acceptance up and false repairs flat, that job class gets more parallel attempts and a bigger budget; false repairs up, both come down.</a:t>
             </a:r>
             <a:endParaRPr lang="en-US" sz="1200"/>
           </a:p>
@@ -2719,7 +2719,7 @@
                 <a:ea typeface="Arial"/>
                 <a:cs typeface="Arial"/>
               </a:rPr>
-              <a:t xml:space="preserve">35:00 to 38:00 · steady</a:t>
+              <a:t xml:space="preserve">34:00 to 37:30 · steady</a:t>
             </a:r>
             <a:endParaRPr lang="en-US" sz="1200"/>
           </a:p>
@@ -2880,191 +2880,145 @@
                 <a:ea typeface="Arial"/>
                 <a:cs typeface="Arial"/>
               </a:rPr>
-              <a:t xml:space="preserve">You do not need the whole agent factory to start. Take one agent that writes SQL, builds reports, runs shell commands or generates scripted API actions. Give it working memory for this job: the goal, constraints, draft and unresolved checks. Give it observational memory across jobs: what it generated, what actually ran, what failed, and what the checks established. Now ask it to consult that history before it hands you the next answer.</a:t>
-            </a:r>
-            <a:endParaRPr lang="en-US" sz="1200"/>
-          </a:p>
-          <a:p>
-            <a:pPr marL="0" indent="0">
-              <a:lnSpc>
-                <a:spcPts val="1560"/>
-              </a:lnSpc>
-              <a:spcAft>
-                <a:spcPts val="0"/>
-              </a:spcAft>
-              <a:buNone/>
-            </a:pPr>
-            <a:r>
-              <a:rPr lang="en-US" sz="1200" b="0">
-                <a:solidFill>
-                  <a:srgbClr val="202b33"/>
-                </a:solidFill>
-                <a:latin typeface="Arial"/>
-                <a:ea typeface="Arial"/>
-                <a:cs typeface="Arial"/>
-              </a:rPr>
-              <a:t xml:space="preserve"/>
-            </a:r>
-            <a:endParaRPr lang="en-US" sz="1200"/>
-          </a:p>
-          <a:p>
-            <a:pPr marL="0" indent="0">
-              <a:lnSpc>
-                <a:spcPts val="1560"/>
-              </a:lnSpc>
-              <a:spcAft>
-                <a:spcPts val="0"/>
-              </a:spcAft>
-              <a:buNone/>
-            </a:pPr>
-            <a:r>
-              <a:rPr lang="en-US" sz="1200" b="0">
-                <a:solidFill>
-                  <a:srgbClr val="202b33"/>
-                </a:solidFill>
-                <a:latin typeface="Arial"/>
-                <a:ea typeface="Arial"/>
-                <a:cs typeface="Arial"/>
-              </a:rPr>
-              <a:t xml:space="preserve">Suppose a reporting query keeps forgetting the tenant filter. It runs perfectly well; it reports the wrong population. An independent preflight check rejects it before dispatch. Record the draft, the failed check, the correction and the eventual result. Next time, retrieve that pattern while the agent is still drafting. Fix the omission before returning the SQL, then run the check again. That is adaptive behavior you can build with one agent and a small log.</a:t>
-            </a:r>
-            <a:endParaRPr lang="en-US" sz="1200"/>
-          </a:p>
-          <a:p>
-            <a:pPr marL="0" indent="0">
-              <a:lnSpc>
-                <a:spcPts val="1560"/>
-              </a:lnSpc>
-              <a:spcAft>
-                <a:spcPts val="0"/>
-              </a:spcAft>
-              <a:buNone/>
-            </a:pPr>
-            <a:r>
-              <a:rPr lang="en-US" sz="1200" b="0">
-                <a:solidFill>
-                  <a:srgbClr val="202b33"/>
-                </a:solidFill>
-                <a:latin typeface="Arial"/>
-                <a:ea typeface="Arial"/>
-                <a:cs typeface="Arial"/>
-              </a:rPr>
-              <a:t xml:space="preserve"/>
-            </a:r>
-            <a:endParaRPr lang="en-US" sz="1200"/>
-          </a:p>
-          <a:p>
-            <a:pPr marL="0" indent="0">
-              <a:lnSpc>
-                <a:spcPts val="1560"/>
-              </a:lnSpc>
-              <a:spcAft>
-                <a:spcPts val="0"/>
-              </a:spcAft>
-              <a:buNone/>
-            </a:pPr>
-            <a:r>
-              <a:rPr lang="en-US" sz="1200" b="0">
-                <a:solidFill>
-                  <a:srgbClr val="202b33"/>
-                </a:solidFill>
-                <a:latin typeface="Arial"/>
-                <a:ea typeface="Arial"/>
-                <a:cs typeface="Arial"/>
-              </a:rPr>
-              <a:t xml:space="preserve">Count patterns, not just anecdotes. Keep attempts as well as successes, the environment and schema version, and the last time a check passed. A command that worked on yesterday's schema is a clue, not a warranty. The runner records failures even if the model forgets. A clean exit is execution evidence; a plausible report still needs a correctness check. A lost API response stays unknown.</a:t>
-            </a:r>
-            <a:endParaRPr lang="en-US" sz="1200"/>
-          </a:p>
-          <a:p>
-            <a:pPr marL="0" indent="0">
-              <a:lnSpc>
-                <a:spcPts val="1560"/>
-              </a:lnSpc>
-              <a:spcAft>
-                <a:spcPts val="0"/>
-              </a:spcAft>
-              <a:buNone/>
-            </a:pPr>
-            <a:r>
-              <a:rPr lang="en-US" sz="1200" b="0">
-                <a:solidFill>
-                  <a:srgbClr val="202b33"/>
-                </a:solidFill>
-                <a:latin typeface="Arial"/>
-                <a:ea typeface="Arial"/>
-                <a:cs typeface="Arial"/>
-              </a:rPr>
-              <a:t xml:space="preserve"/>
-            </a:r>
-            <a:endParaRPr lang="en-US" sz="1200"/>
-          </a:p>
-          <a:p>
-            <a:pPr marL="0" indent="0">
-              <a:lnSpc>
-                <a:spcPts val="1560"/>
-              </a:lnSpc>
-              <a:spcAft>
-                <a:spcPts val="0"/>
-              </a:spcAft>
-              <a:buNone/>
-            </a:pPr>
-            <a:r>
-              <a:rPr lang="en-US" sz="1200" b="0">
-                <a:solidFill>
-                  <a:srgbClr val="202b33"/>
-                </a:solidFill>
-                <a:latin typeface="Arial"/>
-                <a:ea typeface="Arial"/>
-                <a:cs typeface="Arial"/>
-              </a:rPr>
-              <a:t xml:space="preserve">The instruction is simple: before returning generated work, retrieve relevant memory and correct applicable mistakes; after an authorized execution, record the observed outcome and update the pattern counts. If you cannot check something safely, say what remains unverified. Remembered output is untrusted data and grants no new permissions. The copyable prompt and a small record format are in the handout.</a:t>
-            </a:r>
-            <a:endParaRPr lang="en-US" sz="1200"/>
-          </a:p>
-          <a:p>
-            <a:pPr marL="0" indent="0">
-              <a:lnSpc>
-                <a:spcPts val="1560"/>
-              </a:lnSpc>
-              <a:spcAft>
-                <a:spcPts val="0"/>
-              </a:spcAft>
-              <a:buNone/>
-            </a:pPr>
-            <a:r>
-              <a:rPr lang="en-US" sz="1200" b="0">
-                <a:solidFill>
-                  <a:srgbClr val="202b33"/>
-                </a:solidFill>
-                <a:latin typeface="Arial"/>
-                <a:ea typeface="Arial"/>
-                <a:cs typeface="Arial"/>
-              </a:rPr>
-              <a:t xml:space="preserve"/>
-            </a:r>
-            <a:endParaRPr lang="en-US" sz="1200"/>
-          </a:p>
-          <a:p>
-            <a:pPr marL="0" indent="0">
-              <a:lnSpc>
-                <a:spcPts val="1560"/>
-              </a:lnSpc>
-              <a:spcAft>
-                <a:spcPts val="0"/>
-              </a:spcAft>
-              <a:buNone/>
-            </a:pPr>
-            <a:r>
-              <a:rPr lang="en-US" sz="1200" b="0">
-                <a:solidFill>
-                  <a:srgbClr val="202b33"/>
-                </a:solidFill>
-                <a:latin typeface="Arial"/>
-                <a:ea typeface="Arial"/>
-                <a:cs typeface="Arial"/>
-              </a:rPr>
-              <a:t xml:space="preserve">As patterns repeat, turn the reliable ones into tested templates and adapters. The runtime agent learns which evidence to consult; the offline improvement loop evaluates changes to the reusable procedure. Once the known case is covered by code, it need not spend another model call rediscovering the rule.</a:t>
+              <a:t xml:space="preserve">You do not need the whole agent factory to start. Take one agent that writes SQL or runs shell commands. Give it working memory for this job — goal, constraints, draft, unresolved checks — and observational memory across jobs: what it generated, what actually ran, what failed. Then make it consult that history before it hands you the next answer.</a:t>
+            </a:r>
+            <a:endParaRPr lang="en-US" sz="1200"/>
+          </a:p>
+          <a:p>
+            <a:pPr marL="0" indent="0">
+              <a:lnSpc>
+                <a:spcPts val="1560"/>
+              </a:lnSpc>
+              <a:spcAft>
+                <a:spcPts val="0"/>
+              </a:spcAft>
+              <a:buNone/>
+            </a:pPr>
+            <a:r>
+              <a:rPr lang="en-US" sz="1200" b="0">
+                <a:solidFill>
+                  <a:srgbClr val="202b33"/>
+                </a:solidFill>
+                <a:latin typeface="Arial"/>
+                <a:ea typeface="Arial"/>
+                <a:cs typeface="Arial"/>
+              </a:rPr>
+              <a:t xml:space="preserve"/>
+            </a:r>
+            <a:endParaRPr lang="en-US" sz="1200"/>
+          </a:p>
+          <a:p>
+            <a:pPr marL="0" indent="0">
+              <a:lnSpc>
+                <a:spcPts val="1560"/>
+              </a:lnSpc>
+              <a:spcAft>
+                <a:spcPts val="0"/>
+              </a:spcAft>
+              <a:buNone/>
+            </a:pPr>
+            <a:r>
+              <a:rPr lang="en-US" sz="1200" b="0">
+                <a:solidFill>
+                  <a:srgbClr val="202b33"/>
+                </a:solidFill>
+                <a:latin typeface="Arial"/>
+                <a:ea typeface="Arial"/>
+                <a:cs typeface="Arial"/>
+              </a:rPr>
+              <a:t xml:space="preserve">Suppose a reporting query keeps forgetting the tenant filter. It runs perfectly well and reports the wrong population. A preflight check the agent did not write rejects it before dispatch. Record the draft, the failed check, the correction. Next time, retrieve that pattern while the agent is still drafting, fix the omission before returning the SQL, and run the check again. That is adaptive behavior built from one agent and a small log.</a:t>
+            </a:r>
+            <a:endParaRPr lang="en-US" sz="1200"/>
+          </a:p>
+          <a:p>
+            <a:pPr marL="0" indent="0">
+              <a:lnSpc>
+                <a:spcPts val="1560"/>
+              </a:lnSpc>
+              <a:spcAft>
+                <a:spcPts val="0"/>
+              </a:spcAft>
+              <a:buNone/>
+            </a:pPr>
+            <a:r>
+              <a:rPr lang="en-US" sz="1200" b="0">
+                <a:solidFill>
+                  <a:srgbClr val="202b33"/>
+                </a:solidFill>
+                <a:latin typeface="Arial"/>
+                <a:ea typeface="Arial"/>
+                <a:cs typeface="Arial"/>
+              </a:rPr>
+              <a:t xml:space="preserve"/>
+            </a:r>
+            <a:endParaRPr lang="en-US" sz="1200"/>
+          </a:p>
+          <a:p>
+            <a:pPr marL="0" indent="0">
+              <a:lnSpc>
+                <a:spcPts val="1560"/>
+              </a:lnSpc>
+              <a:spcAft>
+                <a:spcPts val="0"/>
+              </a:spcAft>
+              <a:buNone/>
+            </a:pPr>
+            <a:r>
+              <a:rPr lang="en-US" sz="1200" b="0">
+                <a:solidFill>
+                  <a:srgbClr val="202b33"/>
+                </a:solidFill>
+                <a:latin typeface="Arial"/>
+                <a:ea typeface="Arial"/>
+                <a:cs typeface="Arial"/>
+              </a:rPr>
+              <a:t xml:space="preserve">Keep attempts as well as successes, and the schema version with them, because a command that worked on yesterday's schema is a clue and not a warranty. A clean exit is execution evidence; a plausible report still needs a correctness check. Remembered output is untrusted data and grants no new permissions. The copyable prompt and the record format are in the handout.</a:t>
+            </a:r>
+            <a:endParaRPr lang="en-US" sz="1200"/>
+          </a:p>
+          <a:p>
+            <a:pPr marL="0" indent="0">
+              <a:lnSpc>
+                <a:spcPts val="1560"/>
+              </a:lnSpc>
+              <a:spcAft>
+                <a:spcPts val="0"/>
+              </a:spcAft>
+              <a:buNone/>
+            </a:pPr>
+            <a:r>
+              <a:rPr lang="en-US" sz="1200" b="0">
+                <a:solidFill>
+                  <a:srgbClr val="202b33"/>
+                </a:solidFill>
+                <a:latin typeface="Arial"/>
+                <a:ea typeface="Arial"/>
+                <a:cs typeface="Arial"/>
+              </a:rPr>
+              <a:t xml:space="preserve"/>
+            </a:r>
+            <a:endParaRPr lang="en-US" sz="1200"/>
+          </a:p>
+          <a:p>
+            <a:pPr marL="0" indent="0">
+              <a:lnSpc>
+                <a:spcPts val="1560"/>
+              </a:lnSpc>
+              <a:spcAft>
+                <a:spcPts val="0"/>
+              </a:spcAft>
+              <a:buNone/>
+            </a:pPr>
+            <a:r>
+              <a:rPr lang="en-US" sz="1200" b="0">
+                <a:solidFill>
+                  <a:srgbClr val="202b33"/>
+                </a:solidFill>
+                <a:latin typeface="Arial"/>
+                <a:ea typeface="Arial"/>
+                <a:cs typeface="Arial"/>
+              </a:rPr>
+              <a:t xml:space="preserve">As patterns repeat, turn the reliable ones into tested templates. Once the known case is covered by code, it need not spend another model call rediscovering the rule.</a:t>
             </a:r>
             <a:endParaRPr lang="en-US" sz="1200"/>
           </a:p>
@@ -3269,7 +3223,7 @@
                 <a:ea typeface="Arial"/>
                 <a:cs typeface="Arial"/>
               </a:rPr>
-              <a:t xml:space="preserve">38:00 to 40:00 · land</a:t>
+              <a:t xml:space="preserve">37:30 to 40:00 · land</a:t>
             </a:r>
             <a:endParaRPr lang="en-US" sz="1200"/>
           </a:p>
@@ -3453,7 +3407,7 @@
                 <a:ea typeface="Arial"/>
                 <a:cs typeface="Arial"/>
               </a:rPr>
-              <a:t xml:space="preserve">And return to the assistant with everything. It is still coming; nothing on these slides stops it, and I would not want to. What changed is how many of its pathways are live at once. Each job gets a small agent with a tailored prompt, a short tool list, a hard budget, and a log of every time it asked for more. That is the strategy I believe in for the next few years: not one agent holding every combination, which nobody can check, but many small ones you can afford to.</a:t>
+              <a:t xml:space="preserve">And return to the assistant with everything. It is still coming; nothing on these slides stops it, and I would not want them to. What changed is how many of its pathways are live at once. Not one agent holding every combination, which nobody can check. Many small ones you can afford to.</a:t>
             </a:r>
             <a:endParaRPr lang="en-US" sz="1200"/>
           </a:p>
@@ -4116,7 +4070,7 @@
                 <a:ea typeface="Arial"/>
                 <a:cs typeface="Arial"/>
               </a:rPr>
-              <a:t xml:space="preserve">04:00 to 07:00 · build</a:t>
+              <a:t xml:space="preserve">04:00 to 08:30 · build</a:t>
             </a:r>
             <a:endParaRPr lang="en-US" sz="1200"/>
           </a:p>
@@ -4346,145 +4300,145 @@
                 <a:ea typeface="Arial"/>
                 <a:cs typeface="Arial"/>
               </a:rPr>
-              <a:t xml:space="preserve">Browsers now ship a chat that drives the page. WebMCP lets an agent act on any site that opts in, and the list of sites that opt in only goes one direction. The next generation of CLIs will take natural language by default, and you will pass `--no-agent` to get the old behavior back. The intermediary intelligence layer is going to wrap everything, and I know who to blame: the kids. Actually, the kids hate AI. It will be their kids who demand an agent safety blanket on everything. I will be in a rocking chair explaining that the internet was better on vinyl.</a:t>
-            </a:r>
-            <a:endParaRPr lang="en-US" sz="1200"/>
-          </a:p>
-          <a:p>
-            <a:pPr marL="0" indent="0">
-              <a:lnSpc>
-                <a:spcPts val="1560"/>
-              </a:lnSpc>
-              <a:spcAft>
-                <a:spcPts val="0"/>
-              </a:spcAft>
-              <a:buNone/>
-            </a:pPr>
-            <a:r>
-              <a:rPr lang="en-US" sz="1200" b="0">
-                <a:solidFill>
-                  <a:srgbClr val="202b33"/>
-                </a:solidFill>
-                <a:latin typeface="Arial"/>
-                <a:ea typeface="Arial"/>
-                <a:cs typeface="Arial"/>
-              </a:rPr>
-              <a:t xml:space="preserve"/>
-            </a:r>
-            <a:endParaRPr lang="en-US" sz="1200"/>
-          </a:p>
-          <a:p>
-            <a:pPr marL="0" indent="0">
-              <a:lnSpc>
-                <a:spcPts val="1560"/>
-              </a:lnSpc>
-              <a:spcAft>
-                <a:spcPts val="0"/>
-              </a:spcAft>
-              <a:buNone/>
-            </a:pPr>
-            <a:r>
-              <a:rPr lang="en-US" sz="1200" b="0">
-                <a:solidFill>
-                  <a:srgbClr val="202b33"/>
-                </a:solidFill>
-                <a:latin typeface="Arial"/>
-                <a:ea typeface="Arial"/>
-                <a:cs typeface="Arial"/>
-              </a:rPr>
-              <a:t xml:space="preserve">So here is the hazard, and it applies to the small systems too. Risk does not grow with the number of tools. It grows with the number of pathways between them, and every integration multiplies those. Ten tools is forty-five pairs before you count chains. Plug in one SaaS with a dozen endpoints and you did not add twelve capabilities; you added hundreds of routes from something the agent can read to something it can do. Nobody reviews those combinations. Not your security team, not the model, not you at three in the morning. The dangerous pairing is never on the roadmap. It gets discovered.</a:t>
-            </a:r>
-            <a:endParaRPr lang="en-US" sz="1200"/>
-          </a:p>
-          <a:p>
-            <a:pPr marL="0" indent="0">
-              <a:lnSpc>
-                <a:spcPts val="1560"/>
-              </a:lnSpc>
-              <a:spcAft>
-                <a:spcPts val="0"/>
-              </a:spcAft>
-              <a:buNone/>
-            </a:pPr>
-            <a:r>
-              <a:rPr lang="en-US" sz="1200" b="0">
-                <a:solidFill>
-                  <a:srgbClr val="202b33"/>
-                </a:solidFill>
-                <a:latin typeface="Arial"/>
-                <a:ea typeface="Arial"/>
-                <a:cs typeface="Arial"/>
-              </a:rPr>
-              <a:t xml:space="preserve"/>
-            </a:r>
-            <a:endParaRPr lang="en-US" sz="1200"/>
-          </a:p>
-          <a:p>
-            <a:pPr marL="0" indent="0">
-              <a:lnSpc>
-                <a:spcPts val="1560"/>
-              </a:lnSpc>
-              <a:spcAft>
-                <a:spcPts val="0"/>
-              </a:spcAft>
-              <a:buNone/>
-            </a:pPr>
-            <a:r>
-              <a:rPr lang="en-US" sz="1200" b="0">
-                <a:solidFill>
-                  <a:srgbClr val="202b33"/>
-                </a:solidFill>
-                <a:latin typeface="Arial"/>
-                <a:ea typeface="Arial"/>
-                <a:cs typeface="Arial"/>
-              </a:rPr>
-              <a:t xml:space="preserve">Most of the damage will be accidents: a confident mapping, a helpful cleanup, a tool called with the wrong ID. Then there are the people who mean it. That renamed field could carry a sentence aimed at the model, and a vendor payload is untrusted input that now gets read by something that can act.</a:t>
-            </a:r>
-            <a:endParaRPr lang="en-US" sz="1200"/>
-          </a:p>
-          <a:p>
-            <a:pPr marL="0" indent="0">
-              <a:lnSpc>
-                <a:spcPts val="1560"/>
-              </a:lnSpc>
-              <a:spcAft>
-                <a:spcPts val="0"/>
-              </a:spcAft>
-              <a:buNone/>
-            </a:pPr>
-            <a:r>
-              <a:rPr lang="en-US" sz="1200" b="0">
-                <a:solidFill>
-                  <a:srgbClr val="202b33"/>
-                </a:solidFill>
-                <a:latin typeface="Arial"/>
-                <a:ea typeface="Arial"/>
-                <a:cs typeface="Arial"/>
-              </a:rPr>
-              <a:t xml:space="preserve"/>
-            </a:r>
-            <a:endParaRPr lang="en-US" sz="1200"/>
-          </a:p>
-          <a:p>
-            <a:pPr marL="0" indent="0">
-              <a:lnSpc>
-                <a:spcPts val="1560"/>
-              </a:lnSpc>
-              <a:spcAft>
-                <a:spcPts val="0"/>
-              </a:spcAft>
-              <a:buNone/>
-            </a:pPr>
-            <a:r>
-              <a:rPr lang="en-US" sz="1200" b="0">
-                <a:solidFill>
-                  <a:srgbClr val="202b33"/>
-                </a:solidFill>
-                <a:latin typeface="Arial"/>
-                <a:ea typeface="Arial"/>
-                <a:cs typeface="Arial"/>
-              </a:rPr>
-              <a:t xml:space="preserve">So the question is not whether to give the assistant access. It is how to keep the number of live pathways small enough to reason about, one job at a time. That is what the rest of this talk builds. The big assistant still exists. It just never has all of its hands full at once: it conjures a small agent per job, with exactly enough.</a:t>
+              <a:t xml:space="preserve">Browsers ship a chat that drives the page. WebMCP lets an agent act on any site that opts in, and that list only grows. Soon your CLI takes English by default and you pass `--no-agent` to get the old behavior back. I know who to blame: the kids. Actually, the kids hate AI. It will be their kids who demand a safety blanket on everything, and I will be in a rocking chair explaining that the internet was better on vinyl.</a:t>
+            </a:r>
+            <a:endParaRPr lang="en-US" sz="1200"/>
+          </a:p>
+          <a:p>
+            <a:pPr marL="0" indent="0">
+              <a:lnSpc>
+                <a:spcPts val="1560"/>
+              </a:lnSpc>
+              <a:spcAft>
+                <a:spcPts val="0"/>
+              </a:spcAft>
+              <a:buNone/>
+            </a:pPr>
+            <a:r>
+              <a:rPr lang="en-US" sz="1200" b="0">
+                <a:solidFill>
+                  <a:srgbClr val="202b33"/>
+                </a:solidFill>
+                <a:latin typeface="Arial"/>
+                <a:ea typeface="Arial"/>
+                <a:cs typeface="Arial"/>
+              </a:rPr>
+              <a:t xml:space="preserve"/>
+            </a:r>
+            <a:endParaRPr lang="en-US" sz="1200"/>
+          </a:p>
+          <a:p>
+            <a:pPr marL="0" indent="0">
+              <a:lnSpc>
+                <a:spcPts val="1560"/>
+              </a:lnSpc>
+              <a:spcAft>
+                <a:spcPts val="0"/>
+              </a:spcAft>
+              <a:buNone/>
+            </a:pPr>
+            <a:r>
+              <a:rPr lang="en-US" sz="1200" b="0">
+                <a:solidFill>
+                  <a:srgbClr val="202b33"/>
+                </a:solidFill>
+                <a:latin typeface="Arial"/>
+                <a:ea typeface="Arial"/>
+                <a:cs typeface="Arial"/>
+              </a:rPr>
+              <a:t xml:space="preserve">Here is the hazard, and it applies to the small systems too. Risk does not grow with the number of tools. It grows with the pathways between them, and every integration multiplies those. Ten tools is forty-five pairs before you count chains. Plug in one SaaS with a dozen endpoints and you did not add twelve capabilities; you added hundreds of routes from something the agent can read to something it can do. Nobody reviews those combinations. Not your security team, not the model, not you at three in the morning. The dangerous pairing is never on the roadmap. It gets discovered.</a:t>
+            </a:r>
+            <a:endParaRPr lang="en-US" sz="1200"/>
+          </a:p>
+          <a:p>
+            <a:pPr marL="0" indent="0">
+              <a:lnSpc>
+                <a:spcPts val="1560"/>
+              </a:lnSpc>
+              <a:spcAft>
+                <a:spcPts val="0"/>
+              </a:spcAft>
+              <a:buNone/>
+            </a:pPr>
+            <a:r>
+              <a:rPr lang="en-US" sz="1200" b="0">
+                <a:solidFill>
+                  <a:srgbClr val="202b33"/>
+                </a:solidFill>
+                <a:latin typeface="Arial"/>
+                <a:ea typeface="Arial"/>
+                <a:cs typeface="Arial"/>
+              </a:rPr>
+              <a:t xml:space="preserve"/>
+            </a:r>
+            <a:endParaRPr lang="en-US" sz="1200"/>
+          </a:p>
+          <a:p>
+            <a:pPr marL="0" indent="0">
+              <a:lnSpc>
+                <a:spcPts val="1560"/>
+              </a:lnSpc>
+              <a:spcAft>
+                <a:spcPts val="0"/>
+              </a:spcAft>
+              <a:buNone/>
+            </a:pPr>
+            <a:r>
+              <a:rPr lang="en-US" sz="1200" b="0">
+                <a:solidFill>
+                  <a:srgbClr val="202b33"/>
+                </a:solidFill>
+                <a:latin typeface="Arial"/>
+                <a:ea typeface="Arial"/>
+                <a:cs typeface="Arial"/>
+              </a:rPr>
+              <a:t xml:space="preserve">Most of the damage will be accidents: a confident mapping, a helpful cleanup, a tool called with the wrong ID. Then the people who mean it. That renamed field can carry a sentence aimed at the model, because a vendor payload is untrusted input read by something that can act.</a:t>
+            </a:r>
+            <a:endParaRPr lang="en-US" sz="1200"/>
+          </a:p>
+          <a:p>
+            <a:pPr marL="0" indent="0">
+              <a:lnSpc>
+                <a:spcPts val="1560"/>
+              </a:lnSpc>
+              <a:spcAft>
+                <a:spcPts val="0"/>
+              </a:spcAft>
+              <a:buNone/>
+            </a:pPr>
+            <a:r>
+              <a:rPr lang="en-US" sz="1200" b="0">
+                <a:solidFill>
+                  <a:srgbClr val="202b33"/>
+                </a:solidFill>
+                <a:latin typeface="Arial"/>
+                <a:ea typeface="Arial"/>
+                <a:cs typeface="Arial"/>
+              </a:rPr>
+              <a:t xml:space="preserve"/>
+            </a:r>
+            <a:endParaRPr lang="en-US" sz="1200"/>
+          </a:p>
+          <a:p>
+            <a:pPr marL="0" indent="0">
+              <a:lnSpc>
+                <a:spcPts val="1560"/>
+              </a:lnSpc>
+              <a:spcAft>
+                <a:spcPts val="0"/>
+              </a:spcAft>
+              <a:buNone/>
+            </a:pPr>
+            <a:r>
+              <a:rPr lang="en-US" sz="1200" b="0">
+                <a:solidFill>
+                  <a:srgbClr val="202b33"/>
+                </a:solidFill>
+                <a:latin typeface="Arial"/>
+                <a:ea typeface="Arial"/>
+                <a:cs typeface="Arial"/>
+              </a:rPr>
+              <a:t xml:space="preserve">So the question is not whether to grant access. It is how many pathways are live at once. The big assistant still exists; it just never has all of its hands full at the same time, because it conjures a small agent per job with exactly enough.</a:t>
             </a:r>
             <a:endParaRPr lang="en-US" sz="1200"/>
           </a:p>
@@ -4735,7 +4689,7 @@
                 <a:ea typeface="Arial"/>
                 <a:cs typeface="Arial"/>
               </a:rPr>
-              <a:t xml:space="preserve">07:00 to 11:00 · peak</a:t>
+              <a:t xml:space="preserve">08:30 to 12:00 · peak</a:t>
             </a:r>
             <a:endParaRPr lang="en-US" sz="1200"/>
           </a:p>
@@ -5011,53 +4965,53 @@
                 <a:ea typeface="Arial"/>
                 <a:cs typeface="Arial"/>
               </a:rPr>
-              <a:t xml:space="preserve">The orchestrator runs the result through a loop: is the job done, does it need another specialist, or must it stop? A diff agent hands to a fixture-writer agent hands to a reviewer, each with its own blast radius, each disposable when finished. Nobody rents a committee every time a CSV arrives; the known mapping runs as code, and only the unfamiliar case conjures anything.</a:t>
-            </a:r>
-            <a:endParaRPr lang="en-US" sz="1200"/>
-          </a:p>
-          <a:p>
-            <a:pPr marL="0" indent="0">
-              <a:lnSpc>
-                <a:spcPts val="1560"/>
-              </a:lnSpc>
-              <a:spcAft>
-                <a:spcPts val="0"/>
-              </a:spcAft>
-              <a:buNone/>
-            </a:pPr>
-            <a:r>
-              <a:rPr lang="en-US" sz="1200" b="0">
-                <a:solidFill>
-                  <a:srgbClr val="202b33"/>
-                </a:solidFill>
-                <a:latin typeface="Arial"/>
-                <a:ea typeface="Arial"/>
-                <a:cs typeface="Arial"/>
-              </a:rPr>
-              <a:t xml:space="preserve"/>
-            </a:r>
-            <a:endParaRPr lang="en-US" sz="1200"/>
-          </a:p>
-          <a:p>
-            <a:pPr marL="0" indent="0">
-              <a:lnSpc>
-                <a:spcPts val="1560"/>
-              </a:lnSpc>
-              <a:spcAft>
-                <a:spcPts val="0"/>
-              </a:spcAft>
-              <a:buNone/>
-            </a:pPr>
-            <a:r>
-              <a:rPr lang="en-US" sz="1200" b="0">
-                <a:solidFill>
-                  <a:srgbClr val="202b33"/>
-                </a:solidFill>
-                <a:latin typeface="Arial"/>
-                <a:ea typeface="Arial"/>
-                <a:cs typeface="Arial"/>
-              </a:rPr>
-              <a:t xml:space="preserve">I have this working as a prototype on my own integrations. I am not going to give you a success rate today, because I do not have one I trust yet. I can tell you the log of denied tool requests taught me more about my own permissions than any audit.</a:t>
+              <a:t xml:space="preserve">The orchestrator loops on the result: done, needs another specialist, or must stop. A diff agent hands to a fixture-writer hands to a reviewer, each with its own blast radius, each disposable when finished. Nobody rents a committee every time a CSV arrives — the known mapping runs as code, and only the unfamiliar case conjures anything.</a:t>
+            </a:r>
+            <a:endParaRPr lang="en-US" sz="1200"/>
+          </a:p>
+          <a:p>
+            <a:pPr marL="0" indent="0">
+              <a:lnSpc>
+                <a:spcPts val="1560"/>
+              </a:lnSpc>
+              <a:spcAft>
+                <a:spcPts val="0"/>
+              </a:spcAft>
+              <a:buNone/>
+            </a:pPr>
+            <a:r>
+              <a:rPr lang="en-US" sz="1200" b="0">
+                <a:solidFill>
+                  <a:srgbClr val="202b33"/>
+                </a:solidFill>
+                <a:latin typeface="Arial"/>
+                <a:ea typeface="Arial"/>
+                <a:cs typeface="Arial"/>
+              </a:rPr>
+              <a:t xml:space="preserve"/>
+            </a:r>
+            <a:endParaRPr lang="en-US" sz="1200"/>
+          </a:p>
+          <a:p>
+            <a:pPr marL="0" indent="0">
+              <a:lnSpc>
+                <a:spcPts val="1560"/>
+              </a:lnSpc>
+              <a:spcAft>
+                <a:spcPts val="0"/>
+              </a:spcAft>
+              <a:buNone/>
+            </a:pPr>
+            <a:r>
+              <a:rPr lang="en-US" sz="1200" b="0">
+                <a:solidFill>
+                  <a:srgbClr val="202b33"/>
+                </a:solidFill>
+                <a:latin typeface="Arial"/>
+                <a:ea typeface="Arial"/>
+                <a:cs typeface="Arial"/>
+              </a:rPr>
+              <a:t xml:space="preserve">This is a prototype on my own integrations. I am not giving you a success rate today because I do not have one I trust. I can tell you the log of denied tool requests taught me more about my own permissions than any audit.</a:t>
             </a:r>
             <a:endParaRPr lang="en-US" sz="1200"/>
           </a:p>
@@ -5308,7 +5262,7 @@
                 <a:ea typeface="Arial"/>
                 <a:cs typeface="Arial"/>
               </a:rPr>
-              <a:t xml:space="preserve">11:00 to 14:00 · build</a:t>
+              <a:t xml:space="preserve">12:00 to 15:00 · build</a:t>
             </a:r>
             <a:endParaRPr lang="en-US" sz="1200"/>
           </a:p>
@@ -5538,7 +5492,7 @@
                 <a:ea typeface="Arial"/>
                 <a:cs typeface="Arial"/>
               </a:rPr>
-              <a:t xml:space="preserve">This is least privilege, and Saltzer and Schroeder wrote it down in 1975: every program runs with the least set of privileges the job needs. We have all been nodding at that for fifty years and shipping service accounts that can do anything. A per-job agent is the first thing I have built where complying is genuinely easier than not.</a:t>
+              <a:t xml:space="preserve">This is least privilege, written down by Saltzer and Schroeder in 1975. We have been nodding at it for fifty years while shipping service accounts that can do anything. A per-job agent is the first thing I have built where complying is easier than not.</a:t>
             </a:r>
             <a:endParaRPr lang="en-US" sz="1200"/>
           </a:p>
@@ -5630,7 +5584,7 @@
                 <a:ea typeface="Arial"/>
                 <a:cs typeface="Arial"/>
               </a:rPr>
-              <a:t xml:space="preserve">For sensitive processing, the planner gets an opaque job reference. A trusted dispatcher grants a local worker scoped access; the worker touches the data; only an allowlisted status comes back. A signed download URL is a bearer credential. Handing it to a model while asking the model not to use it is not isolation, it is hope.</a:t>
+              <a:t xml:space="preserve">For sensitive processing the planner gets an opaque job reference. A trusted dispatcher grants a local worker scoped access, the worker touches the data, and only an allowlisted status comes back. A signed download URL is a bearer credential; handing it to a model while asking the model not to use it is not isolation, it is hope.</a:t>
             </a:r>
             <a:endParaRPr lang="en-US" sz="1200"/>
           </a:p>
@@ -5927,7 +5881,7 @@
                 <a:ea typeface="Arial"/>
                 <a:cs typeface="Arial"/>
               </a:rPr>
-              <a:t xml:space="preserve">14:00 to 17:00 · build</a:t>
+              <a:t xml:space="preserve">15:00 to 17:00 · build</a:t>
             </a:r>
             <a:endParaRPr lang="en-US" sz="1200"/>
           </a:p>
@@ -6385,7 +6339,7 @@
                 <a:ea typeface="Arial"/>
                 <a:cs typeface="Arial"/>
               </a:rPr>
-              <a:t xml:space="preserve">17:00 to 19:00 · steady</a:t>
+              <a:t xml:space="preserve">17:00 to 18:30 · steady</a:t>
             </a:r>
             <a:endParaRPr lang="en-US" sz="1200"/>
           </a:p>
@@ -6820,7 +6774,7 @@
                 <a:ea typeface="Arial"/>
                 <a:cs typeface="Arial"/>
               </a:rPr>
-              <a:t xml:space="preserve">19:00 to 21:00 · steady</a:t>
+              <a:t xml:space="preserve">18:30 to 20:00 · steady</a:t>
             </a:r>
             <a:endParaRPr lang="en-US" sz="1200"/>
           </a:p>
@@ -7209,7 +7163,7 @@
                 <a:ea typeface="Arial"/>
                 <a:cs typeface="Arial"/>
               </a:rPr>
-              <a:t xml:space="preserve">21:00 to 23:00 · steady</a:t>
+              <a:t xml:space="preserve">20:00 to 21:30 · steady</a:t>
             </a:r>
             <a:endParaRPr lang="en-US" sz="1200"/>
           </a:p>
